--- a/Fase4/03_results/FaseA/Evaluación AgenteRL_F4A_Agente600–Plataformainclinada.pptx
+++ b/Fase4/03_results/FaseA/Evaluación AgenteRL_F4A_Agente600–Plataformainclinada.pptx
@@ -110,6 +110,11 @@
       </a:defRPr>
     </a:lvl9pPr>
   </p:defaultTextStyle>
+  <p:extLst>
+    <p:ext uri="{EFAFB233-063F-42B5-8137-9DF3F51BA10A}">
+      <p15:sldGuideLst xmlns:p15="http://schemas.microsoft.com/office/powerpoint/2012/main"/>
+    </p:ext>
+  </p:extLst>
 </p:presentation>
 </file>
 
@@ -262,7 +267,7 @@
           <a:p>
             <a:fld id="{C9EDC874-0B94-104B-AD4D-F0B4B25CCB1B}" type="datetimeFigureOut">
               <a:rPr lang="es-ES_tradnl" smtClean="0"/>
-              <a:t>11/4/26</a:t>
+              <a:t>12/4/26</a:t>
             </a:fld>
             <a:endParaRPr lang="es-ES_tradnl"/>
           </a:p>
@@ -462,7 +467,7 @@
           <a:p>
             <a:fld id="{C9EDC874-0B94-104B-AD4D-F0B4B25CCB1B}" type="datetimeFigureOut">
               <a:rPr lang="es-ES_tradnl" smtClean="0"/>
-              <a:t>11/4/26</a:t>
+              <a:t>12/4/26</a:t>
             </a:fld>
             <a:endParaRPr lang="es-ES_tradnl"/>
           </a:p>
@@ -672,7 +677,7 @@
           <a:p>
             <a:fld id="{C9EDC874-0B94-104B-AD4D-F0B4B25CCB1B}" type="datetimeFigureOut">
               <a:rPr lang="es-ES_tradnl" smtClean="0"/>
-              <a:t>11/4/26</a:t>
+              <a:t>12/4/26</a:t>
             </a:fld>
             <a:endParaRPr lang="es-ES_tradnl"/>
           </a:p>
@@ -1726,7 +1731,7 @@
           <a:p>
             <a:fld id="{C9EDC874-0B94-104B-AD4D-F0B4B25CCB1B}" type="datetimeFigureOut">
               <a:rPr lang="es-ES_tradnl" smtClean="0"/>
-              <a:t>11/4/26</a:t>
+              <a:t>12/4/26</a:t>
             </a:fld>
             <a:endParaRPr lang="es-ES_tradnl"/>
           </a:p>
@@ -2002,7 +2007,7 @@
           <a:p>
             <a:fld id="{C9EDC874-0B94-104B-AD4D-F0B4B25CCB1B}" type="datetimeFigureOut">
               <a:rPr lang="es-ES_tradnl" smtClean="0"/>
-              <a:t>11/4/26</a:t>
+              <a:t>12/4/26</a:t>
             </a:fld>
             <a:endParaRPr lang="es-ES_tradnl"/>
           </a:p>
@@ -2270,7 +2275,7 @@
           <a:p>
             <a:fld id="{C9EDC874-0B94-104B-AD4D-F0B4B25CCB1B}" type="datetimeFigureOut">
               <a:rPr lang="es-ES_tradnl" smtClean="0"/>
-              <a:t>11/4/26</a:t>
+              <a:t>12/4/26</a:t>
             </a:fld>
             <a:endParaRPr lang="es-ES_tradnl"/>
           </a:p>
@@ -2685,7 +2690,7 @@
           <a:p>
             <a:fld id="{C9EDC874-0B94-104B-AD4D-F0B4B25CCB1B}" type="datetimeFigureOut">
               <a:rPr lang="es-ES_tradnl" smtClean="0"/>
-              <a:t>11/4/26</a:t>
+              <a:t>12/4/26</a:t>
             </a:fld>
             <a:endParaRPr lang="es-ES_tradnl"/>
           </a:p>
@@ -2827,7 +2832,7 @@
           <a:p>
             <a:fld id="{C9EDC874-0B94-104B-AD4D-F0B4B25CCB1B}" type="datetimeFigureOut">
               <a:rPr lang="es-ES_tradnl" smtClean="0"/>
-              <a:t>11/4/26</a:t>
+              <a:t>12/4/26</a:t>
             </a:fld>
             <a:endParaRPr lang="es-ES_tradnl"/>
           </a:p>
@@ -2940,7 +2945,7 @@
           <a:p>
             <a:fld id="{C9EDC874-0B94-104B-AD4D-F0B4B25CCB1B}" type="datetimeFigureOut">
               <a:rPr lang="es-ES_tradnl" smtClean="0"/>
-              <a:t>11/4/26</a:t>
+              <a:t>12/4/26</a:t>
             </a:fld>
             <a:endParaRPr lang="es-ES_tradnl"/>
           </a:p>
@@ -3253,7 +3258,7 @@
           <a:p>
             <a:fld id="{C9EDC874-0B94-104B-AD4D-F0B4B25CCB1B}" type="datetimeFigureOut">
               <a:rPr lang="es-ES_tradnl" smtClean="0"/>
-              <a:t>11/4/26</a:t>
+              <a:t>12/4/26</a:t>
             </a:fld>
             <a:endParaRPr lang="es-ES_tradnl"/>
           </a:p>
@@ -3542,7 +3547,7 @@
           <a:p>
             <a:fld id="{C9EDC874-0B94-104B-AD4D-F0B4B25CCB1B}" type="datetimeFigureOut">
               <a:rPr lang="es-ES_tradnl" smtClean="0"/>
-              <a:t>11/4/26</a:t>
+              <a:t>12/4/26</a:t>
             </a:fld>
             <a:endParaRPr lang="es-ES_tradnl"/>
           </a:p>
@@ -3785,7 +3790,7 @@
           <a:p>
             <a:fld id="{C9EDC874-0B94-104B-AD4D-F0B4B25CCB1B}" type="datetimeFigureOut">
               <a:rPr lang="es-ES_tradnl" smtClean="0"/>
-              <a:t>11/4/26</a:t>
+              <a:t>12/4/26</a:t>
             </a:fld>
             <a:endParaRPr lang="es-ES_tradnl"/>
           </a:p>
@@ -16118,7 +16123,7 @@
                   </a:schemeClr>
                 </a:solidFill>
               </a:rPr>
-              <a:t>Influencias de las perturbaciones en plataforma plana</a:t>
+              <a:t>Influencias de las perturbaciones en plataforma inclinada</a:t>
             </a:r>
           </a:p>
           <a:p>
